--- a/docs/presentation/en/1c-mcp-rag-search-slides-en.pptx
+++ b/docs/presentation/en/1c-mcp-rag-search-slides-en.pptx
@@ -700,7 +700,7 @@
           <a:lstStyle/>
           <a:p>
             <a:r>
-              <a:t>Thirty seconds: who I am, what the artefact is. One sentence to plant the thesis - this is not only 'search works', it is measured quality plus documented decisions. Date and duration are on screen so I keep the pace.</a:t>
+              <a:t>Thirty seconds: who I am, what the artefact is. One sentence to plant the thesis - this is not only 'search works', it is measured quality plus documented decisions. Duration is on screen so I keep the pace.</a:t>
             </a:r>
           </a:p>
         </p:txBody>
@@ -840,7 +840,7 @@
           <a:lstStyle/>
           <a:p>
             <a:r>
-              <a:t>Nine ADRs, five honest limitations. On a defence this is a strength: it shows where the solution stops. The cold start and the missing incremental indexing are the two things a production user would hit first.</a:t>
+              <a:t>Nine ADRs, five honest limitations. As a portfolio piece this is a strength: it shows where the solution stops. The cold start and the missing incremental indexing are the two things a production user would hit first.</a:t>
             </a:r>
           </a:p>
         </p:txBody>
@@ -4754,7 +4754,7 @@
                 </a:solidFill>
                 <a:latin typeface="Calibri"/>
               </a:rPr>
-              <a:t>Defence · 3 November 2026 · 10 minutes + Q&amp;A</a:t>
+              <a:t>English talk · 10 minutes + Q&amp;A</a:t>
             </a:r>
           </a:p>
         </p:txBody>

--- a/docs/presentation/en/1c-mcp-rag-search-slides-en.pptx
+++ b/docs/presentation/en/1c-mcp-rag-search-slides-en.pptx
@@ -770,7 +770,7 @@
           <a:lstStyle/>
           <a:p>
             <a:r>
-              <a:t>Read the table top to bottom: vector 0.339, pearson 0.337, hybrid 0.301, rerank 0.117. Paired comparison: +0.037 with a confidence interval that crosses zero and p = 0.154, so I did not flip the default. The 2x2 ablation then explains why the leader moved: with symbolic chunking hybrid wins, with procedural chunking vector wins, and the export effect at symbolic chunking is inside run noise. One cell is missing because the old dump no longer exists, so additivity is assumed.</a:t>
+              <a:t>Read the table top to bottom: vector 0.339, pearson 0.337, hybrid 0.301, rerank 0.117. The paired test on v2 gives +0.037 with an interval that crosses zero (p = 0.154). I then ran an independent 100-query v3 hold-out that never touched tuning: on 71 code queries over three runs vector is 0.205 and hybrid 0.183, delta +0.023, p = 0.275, again not significant. So the default stays hybrid and ADR 0009 remains proposed. The 2x2 ablation explains why the leader moved: symbolic chunking favours hybrid, procedural chunking favours vector, and the export effect is inside run noise.</a:t>
             </a:r>
           </a:p>
         </p:txBody>
@@ -5578,7 +5578,7 @@
                 </a:solidFill>
                 <a:latin typeface="Calibri"/>
               </a:rPr>
-              <a:t>Paired test: vector vs hybrid</a:t>
+              <a:t>Validation: v2 and independent v3 hold-out</a:t>
             </a:r>
           </a:p>
         </p:txBody>
@@ -5592,7 +5592,7 @@
         <p:spPr>
           <a:xfrm>
             <a:off x="6035040" y="3273552"/>
-            <a:ext cx="5669280" cy="777240"/>
+            <a:ext cx="5669280" cy="822960"/>
           </a:xfrm>
           <a:prstGeom prst="rect">
             <a:avLst/>
@@ -5607,19 +5607,20 @@
           <a:p>
             <a:pPr algn="l">
               <a:lnSpc>
-                <a:spcPct val="105000"/>
-              </a:lnSpc>
-            </a:pPr>
-            <a:r>
-              <a:rPr sz="1080" b="0">
+                <a:spcPct val="100000"/>
+              </a:lnSpc>
+            </a:pPr>
+            <a:r>
+              <a:rPr sz="960" b="0">
                 <a:solidFill>
                   <a:srgbClr val="1F2A33"/>
                 </a:solidFill>
                 <a:latin typeface="Calibri"/>
               </a:rPr>
-              <a:t>Δ nDCG@10 = +0.037
-bootstrap 95% CI [-0.015; +0.086], p = 0.154
-Not significant: default unchanged, ADR 0009 stays proposed.</a:t>
+              <a:t>v2: Δ +0.037, CI [-0.015; +0.086], p = 0.154
+v3 (71 code queries, 3 runs): vector 0.205 ± 0.014 / hybrid 0.183 ± 0.005
+v3: Δ +0.023, CI [-0.019; +0.061], p = 0.275 — not significant
+Both not significant: default hybrid unchanged, ADR 0009 stays proposed.</a:t>
             </a:r>
           </a:p>
         </p:txBody>
@@ -6827,7 +6828,7 @@
                 </a:solidFill>
                 <a:latin typeface="Calibri"/>
               </a:rPr>
-              <a:t>•  The routing gain is within noise; a new hold-out set is needed</a:t>
+              <a:t>•  v3 hold-out: router 58/100; quoted-name lexical cases fall back to hybrid</a:t>
             </a:r>
           </a:p>
         </p:txBody>

--- a/docs/presentation/en/1c-mcp-rag-search-slides-en.pptx
+++ b/docs/presentation/en/1c-mcp-rag-search-slides-en.pptx
@@ -132,7 +132,7 @@
               <a:rPr sz="1200" b="1">
                 <a:latin typeface="Calibri"/>
               </a:rPr>
-              <a:t>nDCG@10 on the current corpus</a:t>
+              <a:t>nDCG@10, current corpus (fixed BM25)</a:t>
             </a:r>
           </a:p>
         </c:rich>
@@ -191,13 +191,13 @@
                 <c:formatCode>General</c:formatCode>
                 <c:ptCount val="4"/>
                 <c:pt idx="0">
-                  <c:v>0.339</c:v>
+                  <c:v>0.331</c:v>
                 </c:pt>
                 <c:pt idx="1">
-                  <c:v>0.337</c:v>
+                  <c:v>0.383</c:v>
                 </c:pt>
                 <c:pt idx="2">
-                  <c:v>0.301</c:v>
+                  <c:v>0.442</c:v>
                 </c:pt>
                 <c:pt idx="3">
                   <c:v>0.117</c:v>
@@ -263,7 +263,7 @@
       <c:valAx>
         <c:axId val="-2113994440"/>
         <c:scaling>
-          <c:max val="0.4"/>
+          <c:max val="0.55"/>
           <c:min val="0.0"/>
         </c:scaling>
         <c:delete val="0"/>
@@ -770,7 +770,7 @@
           <a:lstStyle/>
           <a:p>
             <a:r>
-              <a:t>Read the table top to bottom: vector 0.339, pearson 0.337, hybrid 0.301, rerank 0.117. The paired test on v2 gives +0.037 with an interval that crosses zero (p = 0.154). I then ran an independent 100-query v3 hold-out that never touched tuning: on 71 code queries over three runs vector is 0.205 and hybrid 0.183, delta +0.023, p = 0.275, again not significant. So the default stays hybrid and ADR 0009 remains proposed. The 2x2 ablation explains why the leader moved: symbolic chunking favours hybrid, procedural chunking favours vector, and the export effect is inside run noise.</a:t>
+              <a:t>Read the table top to bottom: hybrid 0.442, lexical 0.426, pearson 0.383, vector 0.331, rerank 0.117. The paired test gives delta minus 0.112, confidence interval from minus 0.184 to minus 0.038, p = 0.0037: hybrid is significantly better on v2. On the independent v3 hold-out hybrid is 0.217 against vector 0.208, p = 0.635, so not worse. The apparent leader flip was a BM25 tokenizer defect: CamelCase identifiers were not split, so natural queries missed them. I fixed the tokenizer, rebuilt the index, and the old 2x2 ablation is void.</a:t>
             </a:r>
           </a:p>
         </p:txBody>
@@ -840,7 +840,7 @@
           <a:lstStyle/>
           <a:p>
             <a:r>
-              <a:t>Nine ADRs, five honest limitations. As a portfolio piece this is a strength: it shows where the solution stops. The cold start and the missing incremental indexing are the two things a production user would hit first.</a:t>
+              <a:t>Ten ADRs, five honest limitations. As a portfolio piece this is a strength: it shows where the solution stops. The cold start and the missing incremental indexing are the two things a production user would hit first.</a:t>
             </a:r>
           </a:p>
         </p:txBody>
@@ -1330,7 +1330,7 @@
           <a:lstStyle/>
           <a:p>
             <a:r>
-              <a:t>RRF is the central past design decision. We fuse positions, not scores, so no weights are tuned. On the old corpus this gave a +19% gain over vector. On the current corpus the order flipped - that is slide 10, and it is recorded in ADR 0009.</a:t>
+              <a:t>RRF is the central past design decision. We fuse positions, not scores, so no weights are tuned. On the old corpus this gave a +19% gain over vector. On the current corpus the apparent flip was a BM25 tokenizer defect; after the fix hybrid leads again (0.442 vs 0.331) - that is slide 10 and ADR 0010.</a:t>
             </a:r>
           </a:p>
         </p:txBody>
@@ -4947,7 +4947,7 @@
         </p:nvGraphicFramePr>
         <p:xfrm>
           <a:off x="502920" y="1051560"/>
-          <a:ext cx="11185852" cy="1874519"/>
+          <a:ext cx="11185852" cy="2011680"/>
         </p:xfrm>
         <a:graphic>
           <a:graphicData uri="http://schemas.openxmlformats.org/drawingml/2006/table">
@@ -4962,14 +4962,14 @@
                 <a:gridCol w="2165004"/>
                 <a:gridCol w="2074795"/>
               </a:tblGrid>
-              <a:tr h="374903">
+              <a:tr h="335280">
                 <a:tc>
                   <a:txBody>
                     <a:bodyPr lIns="73152" rIns="73152" tIns="18288" bIns="18288"/>
                     <a:lstStyle/>
                     <a:p>
                       <a:r>
-                        <a:rPr sz="1200" b="1">
+                        <a:rPr sz="1080" b="1">
                           <a:solidFill>
                             <a:srgbClr val="FFFFFF"/>
                           </a:solidFill>
@@ -4991,7 +4991,7 @@
                     <a:lstStyle/>
                     <a:p>
                       <a:r>
-                        <a:rPr sz="1200" b="1">
+                        <a:rPr sz="1080" b="1">
                           <a:solidFill>
                             <a:srgbClr val="FFFFFF"/>
                           </a:solidFill>
@@ -5013,7 +5013,7 @@
                     <a:lstStyle/>
                     <a:p>
                       <a:r>
-                        <a:rPr sz="1200" b="1">
+                        <a:rPr sz="1080" b="1">
                           <a:solidFill>
                             <a:srgbClr val="FFFFFF"/>
                           </a:solidFill>
@@ -5035,7 +5035,7 @@
                     <a:lstStyle/>
                     <a:p>
                       <a:r>
-                        <a:rPr sz="1200" b="1">
+                        <a:rPr sz="1080" b="1">
                           <a:solidFill>
                             <a:srgbClr val="FFFFFF"/>
                           </a:solidFill>
@@ -5057,7 +5057,7 @@
                     <a:lstStyle/>
                     <a:p>
                       <a:r>
-                        <a:rPr sz="1200" b="1">
+                        <a:rPr sz="1080" b="1">
                           <a:solidFill>
                             <a:srgbClr val="FFFFFF"/>
                           </a:solidFill>
@@ -5074,14 +5074,14 @@
                   </a:tcPr>
                 </a:tc>
               </a:tr>
-              <a:tr h="374903">
+              <a:tr h="335280">
                 <a:tc>
                   <a:txBody>
                     <a:bodyPr lIns="73152" rIns="73152" tIns="18288" bIns="18288"/>
                     <a:lstStyle/>
                     <a:p>
                       <a:r>
-                        <a:rPr sz="1200" b="0">
+                        <a:rPr sz="1080" b="0">
                           <a:solidFill>
                             <a:srgbClr val="1F2A33"/>
                           </a:solidFill>
@@ -5103,13 +5103,13 @@
                     <a:lstStyle/>
                     <a:p>
                       <a:r>
-                        <a:rPr sz="1200" b="0">
+                        <a:rPr sz="1080" b="0">
                           <a:solidFill>
                             <a:srgbClr val="1F2A33"/>
                           </a:solidFill>
                           <a:latin typeface="Calibri"/>
                         </a:rPr>
-                        <a:t>0.150 ± 0.007</a:t>
+                        <a:t>0.157 ± 0.018</a:t>
                       </a:r>
                     </a:p>
                   </a:txBody>
@@ -5125,13 +5125,13 @@
                     <a:lstStyle/>
                     <a:p>
                       <a:r>
-                        <a:rPr sz="1200" b="0">
+                        <a:rPr sz="1080" b="0">
                           <a:solidFill>
                             <a:srgbClr val="1F2A33"/>
                           </a:solidFill>
                           <a:latin typeface="Calibri"/>
                         </a:rPr>
-                        <a:t>0.268 ± 0.019</a:t>
+                        <a:t>0.266 ± 0.026</a:t>
                       </a:r>
                     </a:p>
                   </a:txBody>
@@ -5147,13 +5147,13 @@
                     <a:lstStyle/>
                     <a:p>
                       <a:r>
-                        <a:rPr sz="1200" b="0">
+                        <a:rPr sz="1080" b="0">
                           <a:solidFill>
                             <a:srgbClr val="1F2A33"/>
                           </a:solidFill>
                           <a:latin typeface="Calibri"/>
                         </a:rPr>
-                        <a:t>0.339 ± 0.023</a:t>
+                        <a:t>0.331 ± 0.028</a:t>
                       </a:r>
                     </a:p>
                   </a:txBody>
@@ -5169,13 +5169,13 @@
                     <a:lstStyle/>
                     <a:p>
                       <a:r>
-                        <a:rPr sz="1200" b="0">
+                        <a:rPr sz="1080" b="0">
                           <a:solidFill>
                             <a:srgbClr val="1F2A33"/>
                           </a:solidFill>
                           <a:latin typeface="Calibri"/>
                         </a:rPr>
-                        <a:t>0.523 ± 0.030</a:t>
+                        <a:t>0.511 ± 0.044</a:t>
                       </a:r>
                     </a:p>
                   </a:txBody>
@@ -5186,14 +5186,14 @@
                   </a:tcPr>
                 </a:tc>
               </a:tr>
-              <a:tr h="374903">
+              <a:tr h="335280">
                 <a:tc>
                   <a:txBody>
                     <a:bodyPr lIns="73152" rIns="73152" tIns="18288" bIns="18288"/>
                     <a:lstStyle/>
                     <a:p>
                       <a:r>
-                        <a:rPr sz="1200" b="0">
+                        <a:rPr sz="1080" b="0">
                           <a:solidFill>
                             <a:srgbClr val="1F2A33"/>
                           </a:solidFill>
@@ -5215,13 +5215,13 @@
                     <a:lstStyle/>
                     <a:p>
                       <a:r>
-                        <a:rPr sz="1200" b="0">
+                        <a:rPr sz="1080" b="0">
                           <a:solidFill>
                             <a:srgbClr val="1F2A33"/>
                           </a:solidFill>
                           <a:latin typeface="Calibri"/>
                         </a:rPr>
-                        <a:t>0.179 ± 0.021</a:t>
+                        <a:t>0.207 ± 0.038</a:t>
                       </a:r>
                     </a:p>
                   </a:txBody>
@@ -5237,13 +5237,13 @@
                     <a:lstStyle/>
                     <a:p>
                       <a:r>
-                        <a:rPr sz="1200" b="0">
+                        <a:rPr sz="1080" b="0">
                           <a:solidFill>
                             <a:srgbClr val="1F2A33"/>
                           </a:solidFill>
                           <a:latin typeface="Calibri"/>
                         </a:rPr>
-                        <a:t>0.270 ± 0.024</a:t>
+                        <a:t>0.313 ± 0.039</a:t>
                       </a:r>
                     </a:p>
                   </a:txBody>
@@ -5259,13 +5259,13 @@
                     <a:lstStyle/>
                     <a:p>
                       <a:r>
-                        <a:rPr sz="1200" b="0">
+                        <a:rPr sz="1080" b="0">
                           <a:solidFill>
                             <a:srgbClr val="1F2A33"/>
                           </a:solidFill>
                           <a:latin typeface="Calibri"/>
                         </a:rPr>
-                        <a:t>0.337 ± 0.030</a:t>
+                        <a:t>0.383 ± 0.040</a:t>
                       </a:r>
                     </a:p>
                   </a:txBody>
@@ -5281,13 +5281,13 @@
                     <a:lstStyle/>
                     <a:p>
                       <a:r>
-                        <a:rPr sz="1200" b="0">
+                        <a:rPr sz="1080" b="0">
                           <a:solidFill>
                             <a:srgbClr val="1F2A33"/>
                           </a:solidFill>
                           <a:latin typeface="Calibri"/>
                         </a:rPr>
-                        <a:t>0.511 ± 0.048</a:t>
+                        <a:t>0.562 ± 0.053</a:t>
                       </a:r>
                     </a:p>
                   </a:txBody>
@@ -5298,14 +5298,14 @@
                   </a:tcPr>
                 </a:tc>
               </a:tr>
-              <a:tr h="374903">
+              <a:tr h="335280">
                 <a:tc>
                   <a:txBody>
                     <a:bodyPr lIns="73152" rIns="73152" tIns="18288" bIns="18288"/>
                     <a:lstStyle/>
                     <a:p>
                       <a:r>
-                        <a:rPr sz="1200" b="0">
+                        <a:rPr sz="1080" b="0">
                           <a:solidFill>
                             <a:srgbClr val="1F2A33"/>
                           </a:solidFill>
@@ -5327,13 +5327,13 @@
                     <a:lstStyle/>
                     <a:p>
                       <a:r>
-                        <a:rPr sz="1200" b="0">
+                        <a:rPr sz="1080" b="0">
                           <a:solidFill>
                             <a:srgbClr val="1F2A33"/>
                           </a:solidFill>
                           <a:latin typeface="Calibri"/>
                         </a:rPr>
-                        <a:t>0.129 ± 0.010</a:t>
+                        <a:t>0.221 ± 0.008</a:t>
                       </a:r>
                     </a:p>
                   </a:txBody>
@@ -5349,13 +5349,13 @@
                     <a:lstStyle/>
                     <a:p>
                       <a:r>
-                        <a:rPr sz="1200" b="0">
+                        <a:rPr sz="1080" b="0">
                           <a:solidFill>
                             <a:srgbClr val="1F2A33"/>
                           </a:solidFill>
                           <a:latin typeface="Calibri"/>
                         </a:rPr>
-                        <a:t>0.240 ± 0.013</a:t>
+                        <a:t>0.368 ± 0.010</a:t>
                       </a:r>
                     </a:p>
                   </a:txBody>
@@ -5371,13 +5371,13 @@
                     <a:lstStyle/>
                     <a:p>
                       <a:r>
-                        <a:rPr sz="1200" b="0">
+                        <a:rPr sz="1080" b="0">
                           <a:solidFill>
                             <a:srgbClr val="1F2A33"/>
                           </a:solidFill>
                           <a:latin typeface="Calibri"/>
                         </a:rPr>
-                        <a:t>0.301 ± 0.017</a:t>
+                        <a:t>0.442 ± 0.012</a:t>
                       </a:r>
                     </a:p>
                   </a:txBody>
@@ -5393,13 +5393,13 @@
                     <a:lstStyle/>
                     <a:p>
                       <a:r>
-                        <a:rPr sz="1200" b="0">
+                        <a:rPr sz="1080" b="0">
                           <a:solidFill>
                             <a:srgbClr val="1F2A33"/>
                           </a:solidFill>
                           <a:latin typeface="Calibri"/>
                         </a:rPr>
-                        <a:t>0.482 ± 0.034</a:t>
+                        <a:t>0.652 ± 0.024</a:t>
                       </a:r>
                     </a:p>
                   </a:txBody>
@@ -5410,20 +5410,20 @@
                   </a:tcPr>
                 </a:tc>
               </a:tr>
-              <a:tr h="374907">
+              <a:tr h="335280">
                 <a:tc>
                   <a:txBody>
                     <a:bodyPr lIns="73152" rIns="73152" tIns="18288" bIns="18288"/>
                     <a:lstStyle/>
                     <a:p>
                       <a:r>
-                        <a:rPr sz="1200" b="0">
+                        <a:rPr sz="1080" b="0">
                           <a:solidFill>
                             <a:srgbClr val="1F2A33"/>
                           </a:solidFill>
                           <a:latin typeface="Calibri"/>
                         </a:rPr>
-                        <a:t>hybrid + rerank</a:t>
+                        <a:t>lexical (BM25)</a:t>
                       </a:r>
                     </a:p>
                   </a:txBody>
@@ -5439,13 +5439,13 @@
                     <a:lstStyle/>
                     <a:p>
                       <a:r>
-                        <a:rPr sz="1200" b="0">
+                        <a:rPr sz="1080" b="0">
                           <a:solidFill>
                             <a:srgbClr val="1F2A33"/>
                           </a:solidFill>
                           <a:latin typeface="Calibri"/>
                         </a:rPr>
-                        <a:t>0.086</a:t>
+                        <a:t>0.271</a:t>
                       </a:r>
                     </a:p>
                   </a:txBody>
@@ -5461,13 +5461,13 @@
                     <a:lstStyle/>
                     <a:p>
                       <a:r>
-                        <a:rPr sz="1200" b="0">
+                        <a:rPr sz="1080" b="0">
                           <a:solidFill>
                             <a:srgbClr val="1F2A33"/>
                           </a:solidFill>
                           <a:latin typeface="Calibri"/>
                         </a:rPr>
-                        <a:t>0.102</a:t>
+                        <a:t>0.355</a:t>
                       </a:r>
                     </a:p>
                   </a:txBody>
@@ -5483,13 +5483,13 @@
                     <a:lstStyle/>
                     <a:p>
                       <a:r>
-                        <a:rPr sz="1200" b="0">
+                        <a:rPr sz="1080" b="0">
                           <a:solidFill>
                             <a:srgbClr val="1F2A33"/>
                           </a:solidFill>
                           <a:latin typeface="Calibri"/>
                         </a:rPr>
-                        <a:t>0.117</a:t>
+                        <a:t>0.426</a:t>
                       </a:r>
                     </a:p>
                   </a:txBody>
@@ -5505,7 +5505,119 @@
                     <a:lstStyle/>
                     <a:p>
                       <a:r>
-                        <a:rPr sz="1200" b="0">
+                        <a:rPr sz="1080" b="0">
+                          <a:solidFill>
+                            <a:srgbClr val="1F2A33"/>
+                          </a:solidFill>
+                          <a:latin typeface="Calibri"/>
+                        </a:rPr>
+                        <a:t>0.571</a:t>
+                      </a:r>
+                    </a:p>
+                  </a:txBody>
+                  <a:tcPr anchor="ctr">
+                    <a:solidFill>
+                      <a:srgbClr val="EAF2F7"/>
+                    </a:solidFill>
+                  </a:tcPr>
+                </a:tc>
+              </a:tr>
+              <a:tr h="335280">
+                <a:tc>
+                  <a:txBody>
+                    <a:bodyPr lIns="73152" rIns="73152" tIns="18288" bIns="18288"/>
+                    <a:lstStyle/>
+                    <a:p>
+                      <a:r>
+                        <a:rPr sz="1080" b="0">
+                          <a:solidFill>
+                            <a:srgbClr val="1F2A33"/>
+                          </a:solidFill>
+                          <a:latin typeface="Calibri"/>
+                        </a:rPr>
+                        <a:t>hybrid + rerank</a:t>
+                      </a:r>
+                    </a:p>
+                  </a:txBody>
+                  <a:tcPr anchor="ctr">
+                    <a:solidFill>
+                      <a:srgbClr val="FFFFFF"/>
+                    </a:solidFill>
+                  </a:tcPr>
+                </a:tc>
+                <a:tc>
+                  <a:txBody>
+                    <a:bodyPr lIns="73152" rIns="73152" tIns="18288" bIns="18288"/>
+                    <a:lstStyle/>
+                    <a:p>
+                      <a:r>
+                        <a:rPr sz="1080" b="0">
+                          <a:solidFill>
+                            <a:srgbClr val="1F2A33"/>
+                          </a:solidFill>
+                          <a:latin typeface="Calibri"/>
+                        </a:rPr>
+                        <a:t>0.086</a:t>
+                      </a:r>
+                    </a:p>
+                  </a:txBody>
+                  <a:tcPr anchor="ctr">
+                    <a:solidFill>
+                      <a:srgbClr val="FFFFFF"/>
+                    </a:solidFill>
+                  </a:tcPr>
+                </a:tc>
+                <a:tc>
+                  <a:txBody>
+                    <a:bodyPr lIns="73152" rIns="73152" tIns="18288" bIns="18288"/>
+                    <a:lstStyle/>
+                    <a:p>
+                      <a:r>
+                        <a:rPr sz="1080" b="0">
+                          <a:solidFill>
+                            <a:srgbClr val="1F2A33"/>
+                          </a:solidFill>
+                          <a:latin typeface="Calibri"/>
+                        </a:rPr>
+                        <a:t>0.102</a:t>
+                      </a:r>
+                    </a:p>
+                  </a:txBody>
+                  <a:tcPr anchor="ctr">
+                    <a:solidFill>
+                      <a:srgbClr val="FFFFFF"/>
+                    </a:solidFill>
+                  </a:tcPr>
+                </a:tc>
+                <a:tc>
+                  <a:txBody>
+                    <a:bodyPr lIns="73152" rIns="73152" tIns="18288" bIns="18288"/>
+                    <a:lstStyle/>
+                    <a:p>
+                      <a:r>
+                        <a:rPr sz="1080" b="0">
+                          <a:solidFill>
+                            <a:srgbClr val="1F2A33"/>
+                          </a:solidFill>
+                          <a:latin typeface="Calibri"/>
+                        </a:rPr>
+                        <a:t>0.117</a:t>
+                      </a:r>
+                    </a:p>
+                  </a:txBody>
+                  <a:tcPr anchor="ctr">
+                    <a:solidFill>
+                      <a:srgbClr val="FFFFFF"/>
+                    </a:solidFill>
+                  </a:tcPr>
+                </a:tc>
+                <a:tc>
+                  <a:txBody>
+                    <a:bodyPr lIns="73152" rIns="73152" tIns="18288" bIns="18288"/>
+                    <a:lstStyle/>
+                    <a:p>
+                      <a:r>
+                        <a:rPr sz="1080" b="0">
                           <a:solidFill>
                             <a:srgbClr val="1F2A33"/>
                           </a:solidFill>
@@ -5517,7 +5629,7 @@
                   </a:txBody>
                   <a:tcPr anchor="ctr">
                     <a:solidFill>
-                      <a:srgbClr val="EAF2F7"/>
+                      <a:srgbClr val="FFFFFF"/>
                     </a:solidFill>
                   </a:tcPr>
                 </a:tc>
@@ -5535,8 +5647,8 @@
           <p:nvPr/>
         </p:nvGraphicFramePr>
         <p:xfrm>
-          <a:off x="502920" y="3108960"/>
-          <a:ext cx="5212080" cy="2240280"/>
+          <a:off x="502920" y="3200400"/>
+          <a:ext cx="5212080" cy="2148840"/>
         </p:xfrm>
         <a:graphic>
           <a:graphicData uri="http://schemas.openxmlformats.org/drawingml/2006/chart">
@@ -5578,7 +5690,7 @@
                 </a:solidFill>
                 <a:latin typeface="Calibri"/>
               </a:rPr>
-              <a:t>Validation: v2 and independent v3 hold-out</a:t>
+              <a:t>Validation: v2 dev and independent v3 hold-out</a:t>
             </a:r>
           </a:p>
         </p:txBody>
@@ -5617,10 +5729,11 @@
                 </a:solidFill>
                 <a:latin typeface="Calibri"/>
               </a:rPr>
-              <a:t>v2: Δ +0.037, CI [-0.015; +0.086], p = 0.154
-v3 (71 code queries, 3 runs): vector 0.205 ± 0.014 / hybrid 0.183 ± 0.005
-v3: Δ +0.023, CI [-0.019; +0.061], p = 0.275 — not significant
-Both not significant: default hybrid unchanged, ADR 0009 stays proposed.</a:t>
+              <a:t>v2 (4 runs): hybrid 0.442 ± 0.012 vs vector 0.331 ± 0.028
+Δ = −0.112, CI [−0.184; −0.038], p = 0.0037 — hybrid better
+v3 (3 runs, 71 code): hybrid 0.217 vs vector 0.208, p = 0.635
+hybrid leads on dev, not worse on v3; default confirmed.
+ADR 0009 rejected; fix documented in ADR 0010.</a:t>
             </a:r>
           </a:p>
         </p:txBody>
@@ -5633,7 +5746,7 @@
         </p:nvSpPr>
         <p:spPr>
           <a:xfrm>
-            <a:off x="6035040" y="4114800"/>
+            <a:off x="6035040" y="4224528"/>
             <a:ext cx="5669280" cy="274320"/>
           </a:xfrm>
           <a:prstGeom prst="rect">
@@ -5659,7 +5772,7 @@
                 </a:solidFill>
                 <a:latin typeface="Calibri"/>
               </a:rPr>
-              <a:t>2×2 ablation (nDCG@10, vector / hybrid)</a:t>
+              <a:t>Why the leader flipped: BM25 tokenizer (ADR 0010)</a:t>
             </a:r>
           </a:p>
         </p:txBody>
@@ -5673,8 +5786,8 @@
           <p:nvPr/>
         </p:nvGraphicFramePr>
         <p:xfrm>
-          <a:off x="6035040" y="4370832"/>
-          <a:ext cx="5650992" cy="1024128"/>
+          <a:off x="6035040" y="4480560"/>
+          <a:ext cx="5650992" cy="868680"/>
         </p:xfrm>
         <a:graphic>
           <a:graphicData uri="http://schemas.openxmlformats.org/drawingml/2006/table">
@@ -5687,7 +5800,7 @@
                 <a:gridCol w="1412748"/>
                 <a:gridCol w="1412748"/>
               </a:tblGrid>
-              <a:tr h="204825">
+              <a:tr h="217170">
                 <a:tc>
                   <a:txBody>
                     <a:bodyPr lIns="73152" rIns="73152" tIns="18288" bIns="18288"/>
@@ -5700,7 +5813,7 @@
                           </a:solidFill>
                           <a:latin typeface="Calibri"/>
                         </a:rPr>
-                        <a:t>2×2 nDCG@10</a:t>
+                        <a:t>v2 nDCG@10</a:t>
                       </a:r>
                     </a:p>
                   </a:txBody>
@@ -5722,7 +5835,7 @@
                           </a:solidFill>
                           <a:latin typeface="Calibri"/>
                         </a:rPr>
-                        <a:t>vector</a:t>
+                        <a:t>before</a:t>
                       </a:r>
                     </a:p>
                   </a:txBody>
@@ -5744,7 +5857,7 @@
                           </a:solidFill>
                           <a:latin typeface="Calibri"/>
                         </a:rPr>
-                        <a:t>hybrid</a:t>
+                        <a:t>after</a:t>
                       </a:r>
                     </a:p>
                   </a:txBody>
@@ -5755,7 +5868,7 @@
                   </a:tcPr>
                 </a:tc>
               </a:tr>
-              <a:tr h="204825">
+              <a:tr h="217170">
                 <a:tc>
                   <a:txBody>
                     <a:bodyPr lIns="73152" rIns="73152" tIns="18288" bIns="18288"/>
@@ -5768,7 +5881,7 @@
                           </a:solidFill>
                           <a:latin typeface="Calibri"/>
                         </a:rPr>
-                        <a:t>old export · symbolic</a:t>
+                        <a:t>vector</a:t>
                       </a:r>
                     </a:p>
                   </a:txBody>
@@ -5790,7 +5903,7 @@
                           </a:solidFill>
                           <a:latin typeface="Calibri"/>
                         </a:rPr>
-                        <a:t>0.176</a:t>
+                        <a:t>0.339</a:t>
                       </a:r>
                     </a:p>
                   </a:txBody>
@@ -5812,7 +5925,7 @@
                           </a:solidFill>
                           <a:latin typeface="Calibri"/>
                         </a:rPr>
-                        <a:t>0.209</a:t>
+                        <a:t>0.331</a:t>
                       </a:r>
                     </a:p>
                   </a:txBody>
@@ -5823,7 +5936,7 @@
                   </a:tcPr>
                 </a:tc>
               </a:tr>
-              <a:tr h="204825">
+              <a:tr h="217170">
                 <a:tc>
                   <a:txBody>
                     <a:bodyPr lIns="73152" rIns="73152" tIns="18288" bIns="18288"/>
@@ -5836,7 +5949,7 @@
                           </a:solidFill>
                           <a:latin typeface="Calibri"/>
                         </a:rPr>
-                        <a:t>old export · procedural</a:t>
+                        <a:t>hybrid</a:t>
                       </a:r>
                     </a:p>
                   </a:txBody>
@@ -5858,7 +5971,7 @@
                           </a:solidFill>
                           <a:latin typeface="Calibri"/>
                         </a:rPr>
-                        <a:t>—</a:t>
+                        <a:t>0.301</a:t>
                       </a:r>
                     </a:p>
                   </a:txBody>
@@ -5880,7 +5993,7 @@
                           </a:solidFill>
                           <a:latin typeface="Calibri"/>
                         </a:rPr>
-                        <a:t>—</a:t>
+                        <a:t>0.442</a:t>
                       </a:r>
                     </a:p>
                   </a:txBody>
@@ -5891,7 +6004,7 @@
                   </a:tcPr>
                 </a:tc>
               </a:tr>
-              <a:tr h="204825">
+              <a:tr h="217170">
                 <a:tc>
                   <a:txBody>
                     <a:bodyPr lIns="73152" rIns="73152" tIns="18288" bIns="18288"/>
@@ -5904,7 +6017,7 @@
                           </a:solidFill>
                           <a:latin typeface="Calibri"/>
                         </a:rPr>
-                        <a:t>current export · symbolic</a:t>
+                        <a:t>lexical</a:t>
                       </a:r>
                     </a:p>
                   </a:txBody>
@@ -5926,7 +6039,7 @@
                           </a:solidFill>
                           <a:latin typeface="Calibri"/>
                         </a:rPr>
-                        <a:t>0.165 ± 0.013</a:t>
+                        <a:t>0.116</a:t>
                       </a:r>
                     </a:p>
                   </a:txBody>
@@ -5948,7 +6061,7 @@
                           </a:solidFill>
                           <a:latin typeface="Calibri"/>
                         </a:rPr>
-                        <a:t>0.205 ± 0.007</a:t>
+                        <a:t>0.426</a:t>
                       </a:r>
                     </a:p>
                   </a:txBody>
@@ -5959,74 +6072,6 @@
                   </a:tcPr>
                 </a:tc>
               </a:tr>
-              <a:tr h="204828">
-                <a:tc>
-                  <a:txBody>
-                    <a:bodyPr lIns="73152" rIns="73152" tIns="18288" bIns="18288"/>
-                    <a:lstStyle/>
-                    <a:p>
-                      <a:r>
-                        <a:rPr sz="960" b="0">
-                          <a:solidFill>
-                            <a:srgbClr val="1F2A33"/>
-                          </a:solidFill>
-                          <a:latin typeface="Calibri"/>
-                        </a:rPr>
-                        <a:t>current export · procedural</a:t>
-                      </a:r>
-                    </a:p>
-                  </a:txBody>
-                  <a:tcPr anchor="ctr">
-                    <a:solidFill>
-                      <a:srgbClr val="EAF2F7"/>
-                    </a:solidFill>
-                  </a:tcPr>
-                </a:tc>
-                <a:tc>
-                  <a:txBody>
-                    <a:bodyPr lIns="73152" rIns="73152" tIns="18288" bIns="18288"/>
-                    <a:lstStyle/>
-                    <a:p>
-                      <a:r>
-                        <a:rPr sz="960" b="0">
-                          <a:solidFill>
-                            <a:srgbClr val="1F2A33"/>
-                          </a:solidFill>
-                          <a:latin typeface="Calibri"/>
-                        </a:rPr>
-                        <a:t>0.339 ± 0.023</a:t>
-                      </a:r>
-                    </a:p>
-                  </a:txBody>
-                  <a:tcPr anchor="ctr">
-                    <a:solidFill>
-                      <a:srgbClr val="EAF2F7"/>
-                    </a:solidFill>
-                  </a:tcPr>
-                </a:tc>
-                <a:tc>
-                  <a:txBody>
-                    <a:bodyPr lIns="73152" rIns="73152" tIns="18288" bIns="18288"/>
-                    <a:lstStyle/>
-                    <a:p>
-                      <a:r>
-                        <a:rPr sz="960" b="0">
-                          <a:solidFill>
-                            <a:srgbClr val="1F2A33"/>
-                          </a:solidFill>
-                          <a:latin typeface="Calibri"/>
-                        </a:rPr>
-                        <a:t>0.301 ± 0.017</a:t>
-                      </a:r>
-                    </a:p>
-                  </a:txBody>
-                  <a:tcPr anchor="ctr">
-                    <a:solidFill>
-                      <a:srgbClr val="EAF2F7"/>
-                    </a:solidFill>
-                  </a:tcPr>
-                </a:tc>
-              </a:tr>
             </a:tbl>
           </a:graphicData>
         </a:graphic>
@@ -6039,8 +6084,8 @@
         </p:nvSpPr>
         <p:spPr>
           <a:xfrm>
-            <a:off x="6035040" y="5504688"/>
-            <a:ext cx="5650992" cy="685800"/>
+            <a:off x="6035040" y="5440680"/>
+            <a:ext cx="5650992" cy="731520"/>
           </a:xfrm>
           <a:prstGeom prst="rect">
             <a:avLst/>
@@ -6059,13 +6104,13 @@
               </a:lnSpc>
             </a:pPr>
             <a:r>
-              <a:rPr sz="969" b="0">
+              <a:rPr sz="940" b="0">
                 <a:solidFill>
                   <a:srgbClr val="1F2A33"/>
                 </a:solidFill>
                 <a:latin typeface="Calibri"/>
               </a:rPr>
-              <a:t>Chunking explains the flip: hybrid leads under symbolic chunking, vector leads under procedural. Export effect at symbolic chunking: −0.012 / −0.004, inside run noise.</a:t>
+              <a:t>CamelCase split: «заказ покупателя» now matches ЗаказПокупателя. The old 2×2 ablation was measured with the defective tokenizer and is void.</a:t>
             </a:r>
           </a:p>
         </p:txBody>
@@ -6078,46 +6123,7 @@
         </p:nvSpPr>
         <p:spPr>
           <a:xfrm>
-            <a:off x="6035040" y="5943600"/>
-            <a:ext cx="5650992" cy="274320"/>
-          </a:xfrm>
-          <a:prstGeom prst="rect">
-            <a:avLst/>
-          </a:prstGeom>
-          <a:noFill/>
-        </p:spPr>
-        <p:txBody>
-          <a:bodyPr wrap="square" anchor="t">
-            <a:spAutoFit/>
-          </a:bodyPr>
-          <a:lstStyle/>
-          <a:p>
-            <a:pPr algn="l">
-              <a:lnSpc>
-                <a:spcPct val="100000"/>
-              </a:lnSpc>
-            </a:pPr>
-            <a:r>
-              <a:rPr sz="940" b="0">
-                <a:solidFill>
-                  <a:srgbClr val="5B6770"/>
-                </a:solidFill>
-                <a:latin typeface="Calibri"/>
-              </a:rPr>
-              <a:t>Interaction cell missing (old dump gone); additivity assumed.</a:t>
-            </a:r>
-          </a:p>
-        </p:txBody>
-      </p:sp>
-      <p:sp>
-        <p:nvSpPr>
-          <p:cNvPr id="14" name="TextBox 13"/>
-          <p:cNvSpPr txBox="1"/>
-          <p:nvPr/>
-        </p:nvSpPr>
-        <p:spPr>
-          <a:xfrm>
-            <a:off x="502920" y="5440680"/>
+            <a:off x="502920" y="5532120"/>
             <a:ext cx="5303520" cy="320040"/>
           </a:xfrm>
           <a:prstGeom prst="rect">
@@ -6415,7 +6421,7 @@
               </a:spcAft>
             </a:pPr>
             <a:r>
-              <a:rPr sz="1400" b="0">
+              <a:rPr sz="1300" b="0">
                 <a:solidFill>
                   <a:srgbClr val="1F2A33"/>
                 </a:solidFill>
@@ -6437,7 +6443,7 @@
               </a:spcAft>
             </a:pPr>
             <a:r>
-              <a:rPr sz="1400" b="0">
+              <a:rPr sz="1300" b="0">
                 <a:solidFill>
                   <a:srgbClr val="1F2A33"/>
                 </a:solidFill>
@@ -6459,7 +6465,7 @@
               </a:spcAft>
             </a:pPr>
             <a:r>
-              <a:rPr sz="1400" b="0">
+              <a:rPr sz="1300" b="0">
                 <a:solidFill>
                   <a:srgbClr val="1F2A33"/>
                 </a:solidFill>
@@ -6481,7 +6487,7 @@
               </a:spcAft>
             </a:pPr>
             <a:r>
-              <a:rPr sz="1400" b="0">
+              <a:rPr sz="1300" b="0">
                 <a:solidFill>
                   <a:srgbClr val="1F2A33"/>
                 </a:solidFill>
@@ -6503,7 +6509,7 @@
               </a:spcAft>
             </a:pPr>
             <a:r>
-              <a:rPr sz="1400" b="0">
+              <a:rPr sz="1300" b="0">
                 <a:solidFill>
                   <a:srgbClr val="1F2A33"/>
                 </a:solidFill>
@@ -6525,7 +6531,7 @@
               </a:spcAft>
             </a:pPr>
             <a:r>
-              <a:rPr sz="1400" b="0">
+              <a:rPr sz="1300" b="0">
                 <a:solidFill>
                   <a:srgbClr val="1F2A33"/>
                 </a:solidFill>
@@ -6547,7 +6553,7 @@
               </a:spcAft>
             </a:pPr>
             <a:r>
-              <a:rPr sz="1400" b="0">
+              <a:rPr sz="1300" b="0">
                 <a:solidFill>
                   <a:srgbClr val="1F2A33"/>
                 </a:solidFill>
@@ -6569,7 +6575,7 @@
               </a:spcAft>
             </a:pPr>
             <a:r>
-              <a:rPr sz="1400" b="0">
+              <a:rPr sz="1300" b="0">
                 <a:solidFill>
                   <a:srgbClr val="1F2A33"/>
                 </a:solidFill>
@@ -6591,13 +6597,35 @@
               </a:spcAft>
             </a:pPr>
             <a:r>
-              <a:rPr sz="1400" b="0">
+              <a:rPr sz="1300" b="0">
                 <a:solidFill>
                   <a:srgbClr val="1F2A33"/>
                 </a:solidFill>
                 <a:latin typeface="Calibri"/>
               </a:rPr>
-              <a:t>•  0009: corpus change - leader moved from hybrid to vector (proposed)</a:t>
+              <a:t>•  0009: corpus change - leader shift rejected (tokenizer defect)</a:t>
+            </a:r>
+          </a:p>
+          <a:p>
+            <a:pPr marL="240000" indent="-240000">
+              <a:lnSpc>
+                <a:spcPct val="100000"/>
+              </a:lnSpc>
+              <a:spcBef>
+                <a:spcPts val="500"/>
+              </a:spcBef>
+              <a:spcAft>
+                <a:spcPts val="300"/>
+              </a:spcAft>
+            </a:pPr>
+            <a:r>
+              <a:rPr sz="1300" b="0">
+                <a:solidFill>
+                  <a:srgbClr val="1F2A33"/>
+                </a:solidFill>
+                <a:latin typeface="Calibri"/>
+              </a:rPr>
+              <a:t>•  0010: CamelCase-aware BM25 - hybrid restored (0.442 vs 0.331)</a:t>
             </a:r>
           </a:p>
         </p:txBody>
@@ -6882,7 +6910,7 @@
                 </a:solidFill>
                 <a:latin typeface="Calibri"/>
               </a:rPr>
-              <a:t>ADR 0009 is deliberately still proposed: the default changes only after an independent sample confirms the shift.</a:t>
+              <a:t>ADR 0009 is rejected: the leader shift was a BM25 tokenizer defect. Default hybrid confirmed by ADR 0010.</a:t>
             </a:r>
           </a:p>
         </p:txBody>
@@ -7248,7 +7276,7 @@
                 </a:solidFill>
                 <a:latin typeface="Calibri"/>
               </a:rPr>
-              <a:t>•  Engineering: 72 tests, ruff + mypy (22 modules) + complexity gate (avg 4.37 A), ADR log, CI green</a:t>
+              <a:t>•  Engineering: 74 tests, ruff + mypy (22 modules) + complexity gate (avg 4.37 A), ADR log, CI green</a:t>
             </a:r>
           </a:p>
         </p:txBody>
@@ -7348,7 +7376,7 @@
                 </a:solidFill>
                 <a:latin typeface="Calibri"/>
               </a:rPr>
-              <a:t>•  Finish the 2x2 ablation, then decide the default mode (ADR 0009)</a:t>
+              <a:t>•  Re-measure metadata and symbolic ablation with the fixed tokenizer</a:t>
             </a:r>
           </a:p>
           <a:p>
@@ -8290,7 +8318,7 @@
                 </a:solidFill>
                 <a:latin typeface="Calibri"/>
               </a:rPr>
-              <a:t>0.339</a:t>
+              <a:t>0.442</a:t>
             </a:r>
           </a:p>
           <a:p>
@@ -8306,7 +8334,7 @@
                 </a:solidFill>
                 <a:latin typeface="Calibri"/>
               </a:rPr>
-              <a:t>nDCG@10, vector (leader)</a:t>
+              <a:t>nDCG@10, hybrid (leader)</a:t>
             </a:r>
           </a:p>
         </p:txBody>
@@ -8638,7 +8666,7 @@
                 </a:solidFill>
                 <a:latin typeface="Calibri"/>
               </a:rPr>
-              <a:t>•  Engineering: Python 3.11/3.12, 72 unit tests, ruff clean, mypy on 22 modules, complexity gate 143 blocks (avg 4.37, A); 40-60 ms/query</a:t>
+              <a:t>•  Engineering: Python 3.11/3.12, 74 unit tests, ruff clean, mypy on 22 modules, complexity gate 143 blocks (avg 4.37, A); 40-60 ms/query</a:t>
             </a:r>
           </a:p>
         </p:txBody>
@@ -12163,7 +12191,7 @@
                 </a:solidFill>
                 <a:latin typeface="Calibri"/>
               </a:rPr>
-              <a:t>•  Current corpus: vector 0.339, hybrid 0.301</a:t>
+              <a:t>•  Current corpus after tokenizer fix: hybrid 0.442, vector 0.331</a:t>
             </a:r>
           </a:p>
           <a:p>
@@ -12185,7 +12213,7 @@
                 </a:solidFill>
                 <a:latin typeface="Calibri"/>
               </a:rPr>
-              <a:t>•  A weighted Pearson variant reaches 0.337, but needs tuned weights</a:t>
+              <a:t>•  A weighted Pearson variant reaches 0.383, but needs tuned weights</a:t>
             </a:r>
           </a:p>
           <a:p>
@@ -12770,7 +12798,7 @@
                 </a:solidFill>
                 <a:latin typeface="Calibri"/>
               </a:rPr>
-              <a:t>•  Current corpus: 0.117 against 0.301 for plain hybrid</a:t>
+              <a:t>•  Current corpus (old tokenizer): 0.117 against 0.301</a:t>
             </a:r>
           </a:p>
           <a:p>
